--- a/docs/generados/MaestroAI-Tecnico-v2.pptx
+++ b/docs/generados/MaestroAI-Tecnico-v2.pptx
@@ -3257,7 +3257,7 @@
                   <a:srgbClr val="334155"/>
                 </a:solidFill>
               </a:rPr>
-              <a:t>Ingesta avanzada — antivirus + OCR: </a:t>
+              <a:t>OCR de escaneados (completar ingesta avanzada): </a:t>
             </a:r>
             <a:r>
               <a:rPr sz="1200">
@@ -3265,7 +3265,7 @@
                   <a:srgbClr val="64748B"/>
                 </a:solidFill>
               </a:rPr>
-              <a:t>Escanear con antivirus el archivo subido y aplicar OCR a PDFs escaneados (sin capa de texto).</a:t>
+              <a:t>Aplicar OCR a PDFs escaneados sin capa de texto (el antivirus en la ingesta ya quedó hecho).</a:t>
             </a:r>
           </a:p>
           <a:p>

--- a/docs/generados/MaestroAI-Tecnico-v2.pptx
+++ b/docs/generados/MaestroAI-Tecnico-v2.pptx
@@ -3245,52 +3245,6 @@
             <a:spAutoFit/>
           </a:bodyPr>
           <a:lstStyle/>
-          <a:p>
-            <a:pPr>
-              <a:spcAft>
-                <a:spcPts val="500"/>
-              </a:spcAft>
-            </a:pPr>
-            <a:r>
-              <a:rPr b="1" sz="1400">
-                <a:solidFill>
-                  <a:srgbClr val="334155"/>
-                </a:solidFill>
-              </a:rPr>
-              <a:t>OCR de escaneados (completar ingesta avanzada): </a:t>
-            </a:r>
-            <a:r>
-              <a:rPr sz="1200">
-                <a:solidFill>
-                  <a:srgbClr val="64748B"/>
-                </a:solidFill>
-              </a:rPr>
-              <a:t>Aplicar OCR a PDFs escaneados sin capa de texto (el antivirus en la ingesta ya quedó hecho).</a:t>
-            </a:r>
-          </a:p>
-          <a:p>
-            <a:pPr>
-              <a:spcAft>
-                <a:spcPts val="500"/>
-              </a:spcAft>
-            </a:pPr>
-            <a:r>
-              <a:rPr b="1" sz="1400">
-                <a:solidFill>
-                  <a:srgbClr val="334155"/>
-                </a:solidFill>
-              </a:rPr>
-              <a:t>MFA (multi-factor) — TOTP: </a:t>
-            </a:r>
-            <a:r>
-              <a:rPr sz="1200">
-                <a:solidFill>
-                  <a:srgbClr val="64748B"/>
-                </a:solidFill>
-              </a:rPr>
-              <a:t>Segundo factor en el login (app autenticadora) con enrolamiento, verificación y códigos de respaldo.</a:t>
-            </a:r>
-          </a:p>
           <a:p>
             <a:pPr>
               <a:spcAft>

--- a/docs/generados/MaestroAI-Tecnico-v2.pptx
+++ b/docs/generados/MaestroAI-Tecnico-v2.pptx
@@ -3257,7 +3257,7 @@
                   <a:srgbClr val="334155"/>
                 </a:solidFill>
               </a:rPr>
-              <a:t>Fine-tuning ligero (LoRA): </a:t>
+              <a:t>Fine-tuning LoRA — entrenamiento real en GPU: </a:t>
             </a:r>
             <a:r>
               <a:rPr sz="1200">
@@ -3265,7 +3265,7 @@
                   <a:srgbClr val="64748B"/>
                 </a:solidFill>
               </a:rPr>
-              <a:t>Pipeline de dataset → anonimización → versionado → entrenamiento LoRA → evals → red team → despliegue.</a:t>
+              <a:t>Conectar el andamiaje (ya hecho: datasets/anonimización/gate/jobs) a un trainer con GPU que entrene el adapter y lo sirva.</a:t>
             </a:r>
           </a:p>
           <a:p>
